--- a/rapports/septembre/La_Redoute_sept2026.pptx
+++ b/rapports/septembre/La_Redoute_sept2026.pptx
@@ -5993,7 +5993,7 @@
                 </a:solidFill>
                 <a:latin typeface="Arial"/>
               </a:rPr>
-              <a:t>MARQUES CITÉES</a:t>
+              <a:t>CATÉGORIES DE PRODUITS</a:t>
             </a:r>
           </a:p>
         </p:txBody>
@@ -6028,7 +6028,7 @@
                 </a:solidFill>
                 <a:latin typeface="Arial"/>
               </a:rPr>
-              <a:t>Part de voix dans les messages utilisateurs</a:t>
+              <a:t>Répartition des requêtes</a:t>
             </a:r>
           </a:p>
         </p:txBody>
@@ -6121,7 +6121,7 @@
         <p:spPr>
           <a:xfrm>
             <a:off x="8296656" y="4389120"/>
-            <a:ext cx="2072640" cy="152400"/>
+            <a:ext cx="2225040" cy="152400"/>
           </a:xfrm>
           <a:prstGeom prst="rect">
             <a:avLst/>
@@ -6142,7 +6142,7 @@
                 </a:solidFill>
                 <a:latin typeface="Arial"/>
               </a:rPr>
-              <a:t>IKEA</a:t>
+              <a:t>Mobilier et décoration</a:t>
             </a:r>
           </a:p>
         </p:txBody>
@@ -6155,7 +6155,7 @@
         </p:nvSpPr>
         <p:spPr>
           <a:xfrm>
-            <a:off x="8077200" y="4675632"/>
+            <a:off x="8077200" y="4626864"/>
             <a:ext cx="121920" cy="121920"/>
           </a:xfrm>
           <a:prstGeom prst="rect">
@@ -6199,8 +6199,8 @@
         </p:nvSpPr>
         <p:spPr>
           <a:xfrm>
-            <a:off x="8296656" y="4657344"/>
-            <a:ext cx="2072640" cy="152400"/>
+            <a:off x="8296656" y="4608576"/>
+            <a:ext cx="2225040" cy="152400"/>
           </a:xfrm>
           <a:prstGeom prst="rect">
             <a:avLst/>
@@ -6221,7 +6221,7 @@
                 </a:solidFill>
                 <a:latin typeface="Arial"/>
               </a:rPr>
-              <a:t>Amazon · 32 %</a:t>
+              <a:t>Mode femme · 20 %</a:t>
             </a:r>
           </a:p>
         </p:txBody>
@@ -6234,7 +6234,7 @@
         </p:nvSpPr>
         <p:spPr>
           <a:xfrm>
-            <a:off x="8077200" y="4943856"/>
+            <a:off x="8077200" y="4846320"/>
             <a:ext cx="121920" cy="121920"/>
           </a:xfrm>
           <a:prstGeom prst="rect">
@@ -6278,8 +6278,8 @@
         </p:nvSpPr>
         <p:spPr>
           <a:xfrm>
-            <a:off x="8296656" y="4925568"/>
-            <a:ext cx="2072640" cy="152400"/>
+            <a:off x="8296656" y="4828032"/>
+            <a:ext cx="2225040" cy="152400"/>
           </a:xfrm>
           <a:prstGeom prst="rect">
             <a:avLst/>
@@ -6300,7 +6300,7 @@
                 </a:solidFill>
                 <a:latin typeface="Arial"/>
               </a:rPr>
-              <a:t>Kiabi · 14 %</a:t>
+              <a:t>Chaussures et accessoires · 15 %</a:t>
             </a:r>
           </a:p>
         </p:txBody>
@@ -6313,7 +6313,7 @@
         </p:nvSpPr>
         <p:spPr>
           <a:xfrm>
-            <a:off x="8077200" y="5212080"/>
+            <a:off x="8077200" y="5065776"/>
             <a:ext cx="121920" cy="121920"/>
           </a:xfrm>
           <a:prstGeom prst="rect">
@@ -6357,8 +6357,8 @@
         </p:nvSpPr>
         <p:spPr>
           <a:xfrm>
-            <a:off x="8296656" y="5193792"/>
-            <a:ext cx="2072640" cy="152400"/>
+            <a:off x="8296656" y="5047488"/>
+            <a:ext cx="2225040" cy="152400"/>
           </a:xfrm>
           <a:prstGeom prst="rect">
             <a:avLst/>
@@ -6379,7 +6379,7 @@
                 </a:solidFill>
                 <a:latin typeface="Arial"/>
               </a:rPr>
-              <a:t>La Redoute · 6 %</a:t>
+              <a:t>Literie et linge de maison · 15 %</a:t>
             </a:r>
           </a:p>
         </p:txBody>
@@ -6392,7 +6392,7 @@
         </p:nvSpPr>
         <p:spPr>
           <a:xfrm>
-            <a:off x="8077200" y="5480304"/>
+            <a:off x="8077200" y="5285232"/>
             <a:ext cx="121920" cy="121920"/>
           </a:xfrm>
           <a:prstGeom prst="rect">
@@ -6436,8 +6436,8 @@
         </p:nvSpPr>
         <p:spPr>
           <a:xfrm>
-            <a:off x="8296656" y="5462016"/>
-            <a:ext cx="2072640" cy="152400"/>
+            <a:off x="8296656" y="5266944"/>
+            <a:ext cx="2225040" cy="152400"/>
           </a:xfrm>
           <a:prstGeom prst="rect">
             <a:avLst/>
@@ -6458,7 +6458,7 @@
                 </a:solidFill>
                 <a:latin typeface="Arial"/>
               </a:rPr>
-              <a:t>Zalando · 4 %</a:t>
+              <a:t>Mode homme · 8 %</a:t>
             </a:r>
           </a:p>
         </p:txBody>
@@ -6471,7 +6471,7 @@
         </p:nvSpPr>
         <p:spPr>
           <a:xfrm>
-            <a:off x="8077200" y="5748528"/>
+            <a:off x="8077200" y="5504688"/>
             <a:ext cx="121920" cy="121920"/>
           </a:xfrm>
           <a:prstGeom prst="rect">
@@ -6515,8 +6515,8 @@
         </p:nvSpPr>
         <p:spPr>
           <a:xfrm>
-            <a:off x="8296656" y="5730240"/>
-            <a:ext cx="2072640" cy="152400"/>
+            <a:off x="8296656" y="5486400"/>
+            <a:ext cx="2225040" cy="152400"/>
           </a:xfrm>
           <a:prstGeom prst="rect">
             <a:avLst/>
@@ -6537,7 +6537,7 @@
                 </a:solidFill>
                 <a:latin typeface="Arial"/>
               </a:rPr>
-              <a:t>Autres · 9 %</a:t>
+              <a:t>Mode enfant · 6 %</a:t>
             </a:r>
           </a:p>
         </p:txBody>
@@ -6550,8 +6550,166 @@
         </p:nvSpPr>
         <p:spPr>
           <a:xfrm>
+            <a:off x="8077200" y="5724144"/>
+            <a:ext cx="121920" cy="121920"/>
+          </a:xfrm>
+          <a:prstGeom prst="rect">
+            <a:avLst/>
+          </a:prstGeom>
+          <a:solidFill>
+            <a:srgbClr val="8CB36B"/>
+          </a:solidFill>
+          <a:ln>
+            <a:noFill/>
+          </a:ln>
+          <a:effectLst/>
+        </p:spPr>
+        <p:style>
+          <a:lnRef idx="1">
+            <a:schemeClr val="accent1"/>
+          </a:lnRef>
+          <a:fillRef idx="3">
+            <a:schemeClr val="accent1"/>
+          </a:fillRef>
+          <a:effectRef idx="2">
+            <a:schemeClr val="accent1"/>
+          </a:effectRef>
+          <a:fontRef idx="minor">
+            <a:schemeClr val="lt1"/>
+          </a:fontRef>
+        </p:style>
+        <p:txBody>
+          <a:bodyPr rtlCol="0" anchor="ctr"/>
+          <a:lstStyle/>
+          <a:p>
+            <a:pPr algn="ctr"/>
+          </a:p>
+        </p:txBody>
+      </p:sp>
+      <p:sp>
+        <p:nvSpPr>
+          <p:cNvPr id="90" name="TextBox 89"/>
+          <p:cNvSpPr txBox="1"/>
+          <p:nvPr/>
+        </p:nvSpPr>
+        <p:spPr>
+          <a:xfrm>
+            <a:off x="8296656" y="5705856"/>
+            <a:ext cx="2225040" cy="152400"/>
+          </a:xfrm>
+          <a:prstGeom prst="rect">
+            <a:avLst/>
+          </a:prstGeom>
+          <a:noFill/>
+        </p:spPr>
+        <p:txBody>
+          <a:bodyPr wrap="square" anchor="t" lIns="0" rIns="0" tIns="0" bIns="0">
+            <a:spAutoFit/>
+          </a:bodyPr>
+          <a:lstStyle/>
+          <a:p>
+            <a:pPr algn="l"/>
+            <a:r>
+              <a:rPr sz="1000" b="0" i="0">
+                <a:solidFill>
+                  <a:srgbClr val="111111"/>
+                </a:solidFill>
+                <a:latin typeface="Arial"/>
+              </a:rPr>
+              <a:t>Jardin et extérieur · 5 %</a:t>
+            </a:r>
+          </a:p>
+        </p:txBody>
+      </p:sp>
+      <p:sp>
+        <p:nvSpPr>
+          <p:cNvPr id="91" name="Rectangle 90"/>
+          <p:cNvSpPr/>
+          <p:nvPr/>
+        </p:nvSpPr>
+        <p:spPr>
+          <a:xfrm>
+            <a:off x="8077200" y="5943600"/>
+            <a:ext cx="121920" cy="121920"/>
+          </a:xfrm>
+          <a:prstGeom prst="rect">
+            <a:avLst/>
+          </a:prstGeom>
+          <a:solidFill>
+            <a:srgbClr val="C95B7A"/>
+          </a:solidFill>
+          <a:ln>
+            <a:noFill/>
+          </a:ln>
+          <a:effectLst/>
+        </p:spPr>
+        <p:style>
+          <a:lnRef idx="1">
+            <a:schemeClr val="accent1"/>
+          </a:lnRef>
+          <a:fillRef idx="3">
+            <a:schemeClr val="accent1"/>
+          </a:fillRef>
+          <a:effectRef idx="2">
+            <a:schemeClr val="accent1"/>
+          </a:effectRef>
+          <a:fontRef idx="minor">
+            <a:schemeClr val="lt1"/>
+          </a:fontRef>
+        </p:style>
+        <p:txBody>
+          <a:bodyPr rtlCol="0" anchor="ctr"/>
+          <a:lstStyle/>
+          <a:p>
+            <a:pPr algn="ctr"/>
+          </a:p>
+        </p:txBody>
+      </p:sp>
+      <p:sp>
+        <p:nvSpPr>
+          <p:cNvPr id="92" name="TextBox 91"/>
+          <p:cNvSpPr txBox="1"/>
+          <p:nvPr/>
+        </p:nvSpPr>
+        <p:spPr>
+          <a:xfrm>
+            <a:off x="8296656" y="5925312"/>
+            <a:ext cx="2225040" cy="152400"/>
+          </a:xfrm>
+          <a:prstGeom prst="rect">
+            <a:avLst/>
+          </a:prstGeom>
+          <a:noFill/>
+        </p:spPr>
+        <p:txBody>
+          <a:bodyPr wrap="square" anchor="t" lIns="0" rIns="0" tIns="0" bIns="0">
+            <a:spAutoFit/>
+          </a:bodyPr>
+          <a:lstStyle/>
+          <a:p>
+            <a:pPr algn="l"/>
+            <a:r>
+              <a:rPr sz="1000" b="0" i="0">
+                <a:solidFill>
+                  <a:srgbClr val="111111"/>
+                </a:solidFill>
+                <a:latin typeface="Arial"/>
+              </a:rPr>
+              <a:t>Arts de la table et cuisine · 3 %</a:t>
+            </a:r>
+          </a:p>
+        </p:txBody>
+      </p:sp>
+      <p:sp>
+        <p:nvSpPr>
+          <p:cNvPr id="93" name="Rectangle 92"/>
+          <p:cNvSpPr/>
+          <p:nvPr/>
+        </p:nvSpPr>
+        <p:spPr>
+          <a:xfrm>
             <a:off x="10564368" y="4450080"/>
-            <a:ext cx="475488" cy="469392"/>
+            <a:ext cx="475488" cy="375513"/>
           </a:xfrm>
           <a:prstGeom prst="rect">
             <a:avLst/>
@@ -6588,14 +6746,14 @@
       </p:sp>
       <p:sp>
         <p:nvSpPr>
-          <p:cNvPr id="90" name="TextBox 89"/>
+          <p:cNvPr id="94" name="TextBox 93"/>
           <p:cNvSpPr txBox="1"/>
           <p:nvPr/>
         </p:nvSpPr>
         <p:spPr>
           <a:xfrm>
             <a:off x="10564368" y="4450080"/>
-            <a:ext cx="475488" cy="469392"/>
+            <a:ext cx="475488" cy="375513"/>
           </a:xfrm>
           <a:prstGeom prst="rect">
             <a:avLst/>
@@ -6616,21 +6774,21 @@
                 </a:solidFill>
                 <a:latin typeface="Arial"/>
               </a:rPr>
-              <a:t>35 %</a:t>
-            </a:r>
-          </a:p>
-        </p:txBody>
-      </p:sp>
-      <p:sp>
-        <p:nvSpPr>
-          <p:cNvPr id="91" name="Rectangle 90"/>
+              <a:t>28 %</a:t>
+            </a:r>
+          </a:p>
+        </p:txBody>
+      </p:sp>
+      <p:sp>
+        <p:nvSpPr>
+          <p:cNvPr id="95" name="Rectangle 94"/>
           <p:cNvSpPr/>
           <p:nvPr/>
         </p:nvSpPr>
         <p:spPr>
           <a:xfrm>
-            <a:off x="10564368" y="4919472"/>
-            <a:ext cx="475488" cy="429158"/>
+            <a:off x="10564368" y="4825593"/>
+            <a:ext cx="475488" cy="268224"/>
           </a:xfrm>
           <a:prstGeom prst="rect">
             <a:avLst/>
@@ -6667,49 +6825,14 @@
       </p:sp>
       <p:sp>
         <p:nvSpPr>
-          <p:cNvPr id="92" name="TextBox 91"/>
-          <p:cNvSpPr txBox="1"/>
-          <p:nvPr/>
-        </p:nvSpPr>
-        <p:spPr>
-          <a:xfrm>
-            <a:off x="10564368" y="4919472"/>
-            <a:ext cx="475488" cy="429158"/>
-          </a:xfrm>
-          <a:prstGeom prst="rect">
-            <a:avLst/>
-          </a:prstGeom>
-          <a:noFill/>
-        </p:spPr>
-        <p:txBody>
-          <a:bodyPr wrap="square" anchor="ctr" lIns="0" rIns="0" tIns="0" bIns="0">
-            <a:spAutoFit/>
-          </a:bodyPr>
-          <a:lstStyle/>
-          <a:p>
-            <a:pPr algn="ctr"/>
-            <a:r>
-              <a:rPr sz="1000" b="1" i="0">
-                <a:solidFill>
-                  <a:srgbClr val="FFFFFF"/>
-                </a:solidFill>
-                <a:latin typeface="Arial"/>
-              </a:rPr>
-              <a:t>32 %</a:t>
-            </a:r>
-          </a:p>
-        </p:txBody>
-      </p:sp>
-      <p:sp>
-        <p:nvSpPr>
-          <p:cNvPr id="93" name="Rectangle 92"/>
+          <p:cNvPr id="96" name="Rectangle 95"/>
           <p:cNvSpPr/>
           <p:nvPr/>
         </p:nvSpPr>
         <p:spPr>
           <a:xfrm>
-            <a:off x="10564368" y="5348630"/>
-            <a:ext cx="475488" cy="187756"/>
+            <a:off x="10564368" y="5093817"/>
+            <a:ext cx="475488" cy="201168"/>
           </a:xfrm>
           <a:prstGeom prst="rect">
             <a:avLst/>
@@ -6746,14 +6869,14 @@
       </p:sp>
       <p:sp>
         <p:nvSpPr>
-          <p:cNvPr id="94" name="Rectangle 93"/>
+          <p:cNvPr id="97" name="Rectangle 96"/>
           <p:cNvSpPr/>
           <p:nvPr/>
         </p:nvSpPr>
         <p:spPr>
           <a:xfrm>
-            <a:off x="10564368" y="5536387"/>
-            <a:ext cx="475488" cy="80467"/>
+            <a:off x="10564368" y="5294985"/>
+            <a:ext cx="475488" cy="201168"/>
           </a:xfrm>
           <a:prstGeom prst="rect">
             <a:avLst/>
@@ -6790,14 +6913,14 @@
       </p:sp>
       <p:sp>
         <p:nvSpPr>
-          <p:cNvPr id="95" name="Rectangle 94"/>
+          <p:cNvPr id="98" name="Rectangle 97"/>
           <p:cNvSpPr/>
           <p:nvPr/>
         </p:nvSpPr>
         <p:spPr>
           <a:xfrm>
-            <a:off x="10564368" y="5616854"/>
-            <a:ext cx="475488" cy="53644"/>
+            <a:off x="10564368" y="5496153"/>
+            <a:ext cx="475488" cy="107289"/>
           </a:xfrm>
           <a:prstGeom prst="rect">
             <a:avLst/>
@@ -6834,20 +6957,108 @@
       </p:sp>
       <p:sp>
         <p:nvSpPr>
-          <p:cNvPr id="96" name="Rectangle 95"/>
+          <p:cNvPr id="99" name="Rectangle 98"/>
           <p:cNvSpPr/>
           <p:nvPr/>
         </p:nvSpPr>
         <p:spPr>
           <a:xfrm>
-            <a:off x="10564368" y="5670499"/>
-            <a:ext cx="475488" cy="120700"/>
+            <a:off x="10564368" y="5603443"/>
+            <a:ext cx="475488" cy="80467"/>
           </a:xfrm>
           <a:prstGeom prst="rect">
             <a:avLst/>
           </a:prstGeom>
           <a:solidFill>
             <a:srgbClr val="A09278"/>
+          </a:solidFill>
+          <a:ln>
+            <a:noFill/>
+          </a:ln>
+          <a:effectLst/>
+        </p:spPr>
+        <p:style>
+          <a:lnRef idx="1">
+            <a:schemeClr val="accent1"/>
+          </a:lnRef>
+          <a:fillRef idx="3">
+            <a:schemeClr val="accent1"/>
+          </a:fillRef>
+          <a:effectRef idx="2">
+            <a:schemeClr val="accent1"/>
+          </a:effectRef>
+          <a:fontRef idx="minor">
+            <a:schemeClr val="lt1"/>
+          </a:fontRef>
+        </p:style>
+        <p:txBody>
+          <a:bodyPr rtlCol="0" anchor="ctr"/>
+          <a:lstStyle/>
+          <a:p>
+            <a:pPr algn="ctr"/>
+          </a:p>
+        </p:txBody>
+      </p:sp>
+      <p:sp>
+        <p:nvSpPr>
+          <p:cNvPr id="100" name="Rectangle 99"/>
+          <p:cNvSpPr/>
+          <p:nvPr/>
+        </p:nvSpPr>
+        <p:spPr>
+          <a:xfrm>
+            <a:off x="10564368" y="5683910"/>
+            <a:ext cx="475488" cy="67056"/>
+          </a:xfrm>
+          <a:prstGeom prst="rect">
+            <a:avLst/>
+          </a:prstGeom>
+          <a:solidFill>
+            <a:srgbClr val="8CB36B"/>
+          </a:solidFill>
+          <a:ln>
+            <a:noFill/>
+          </a:ln>
+          <a:effectLst/>
+        </p:spPr>
+        <p:style>
+          <a:lnRef idx="1">
+            <a:schemeClr val="accent1"/>
+          </a:lnRef>
+          <a:fillRef idx="3">
+            <a:schemeClr val="accent1"/>
+          </a:fillRef>
+          <a:effectRef idx="2">
+            <a:schemeClr val="accent1"/>
+          </a:effectRef>
+          <a:fontRef idx="minor">
+            <a:schemeClr val="lt1"/>
+          </a:fontRef>
+        </p:style>
+        <p:txBody>
+          <a:bodyPr rtlCol="0" anchor="ctr"/>
+          <a:lstStyle/>
+          <a:p>
+            <a:pPr algn="ctr"/>
+          </a:p>
+        </p:txBody>
+      </p:sp>
+      <p:sp>
+        <p:nvSpPr>
+          <p:cNvPr id="101" name="Rectangle 100"/>
+          <p:cNvSpPr/>
+          <p:nvPr/>
+        </p:nvSpPr>
+        <p:spPr>
+          <a:xfrm>
+            <a:off x="10564368" y="5750966"/>
+            <a:ext cx="475488" cy="40233"/>
+          </a:xfrm>
+          <a:prstGeom prst="rect">
+            <a:avLst/>
+          </a:prstGeom>
+          <a:solidFill>
+            <a:srgbClr val="C95B7A"/>
           </a:solidFill>
           <a:ln>
             <a:noFill/>
